--- a/resources/presentations/Lunch-Is-Packed-Module-09-plan-and-construct.pptx
+++ b/resources/presentations/Lunch-Is-Packed-Module-09-plan-and-construct.pptx
@@ -2,20 +2,20 @@
 <file path=ppt/presentation.xml><?xml version="1.0" encoding="utf-8"?>
 <p:presentation xmlns:p="http://schemas.openxmlformats.org/presentationml/2006/main">
   <p:sldMasterIdLst>
-    <p:sldMasterId xmlns:r="http://schemas.openxmlformats.org/officeDocument/2006/relationships" id="2147483648" r:id="R90bea5c42bad41bf"/>
+    <p:sldMasterId xmlns:r="http://schemas.openxmlformats.org/officeDocument/2006/relationships" id="2147483648" r:id="R599f99ba9a1846ac"/>
   </p:sldMasterIdLst>
   <p:notesMasterIdLst>
-    <p:notesMasterId xmlns:r="http://schemas.openxmlformats.org/officeDocument/2006/relationships" r:id="R117995b8c2364c9a"/>
+    <p:notesMasterId xmlns:r="http://schemas.openxmlformats.org/officeDocument/2006/relationships" r:id="R136276a505cb48ba"/>
   </p:notesMasterIdLst>
   <p:sldIdLst>
-    <p:sldId xmlns:r="http://schemas.openxmlformats.org/officeDocument/2006/relationships" id="256" r:id="R115c277ed8ce4ba6"/>
-    <p:sldId xmlns:r="http://schemas.openxmlformats.org/officeDocument/2006/relationships" id="257" r:id="R33bc94816b6a4778"/>
-    <p:sldId xmlns:r="http://schemas.openxmlformats.org/officeDocument/2006/relationships" id="258" r:id="Rdf5dd79703444a41"/>
-    <p:sldId xmlns:r="http://schemas.openxmlformats.org/officeDocument/2006/relationships" id="259" r:id="R232a57eb4ba74f12"/>
-    <p:sldId xmlns:r="http://schemas.openxmlformats.org/officeDocument/2006/relationships" id="260" r:id="Rea92f9f8064e4544"/>
-    <p:sldId xmlns:r="http://schemas.openxmlformats.org/officeDocument/2006/relationships" id="261" r:id="R76bd1043d95741f2"/>
-    <p:sldId xmlns:r="http://schemas.openxmlformats.org/officeDocument/2006/relationships" id="262" r:id="R1152f8e4e7b64574"/>
-    <p:sldId xmlns:r="http://schemas.openxmlformats.org/officeDocument/2006/relationships" id="263" r:id="R5c33ec77104f48e2"/>
+    <p:sldId xmlns:r="http://schemas.openxmlformats.org/officeDocument/2006/relationships" id="256" r:id="R5b631885393349ec"/>
+    <p:sldId xmlns:r="http://schemas.openxmlformats.org/officeDocument/2006/relationships" id="257" r:id="R3add077ea6fc46ad"/>
+    <p:sldId xmlns:r="http://schemas.openxmlformats.org/officeDocument/2006/relationships" id="258" r:id="R510fa3c0b71f4bd5"/>
+    <p:sldId xmlns:r="http://schemas.openxmlformats.org/officeDocument/2006/relationships" id="259" r:id="R6b8addcb18504c05"/>
+    <p:sldId xmlns:r="http://schemas.openxmlformats.org/officeDocument/2006/relationships" id="260" r:id="R32ae655fad1f48f4"/>
+    <p:sldId xmlns:r="http://schemas.openxmlformats.org/officeDocument/2006/relationships" id="261" r:id="R2e13a89df5af40cf"/>
+    <p:sldId xmlns:r="http://schemas.openxmlformats.org/officeDocument/2006/relationships" id="262" r:id="Rd49d1f9339fb48bb"/>
+    <p:sldId xmlns:r="http://schemas.openxmlformats.org/officeDocument/2006/relationships" id="263" r:id="R696ca56d4f0c486b"/>
   </p:sldIdLst>
   <p:sldSz cx="12192000" cy="6858000"/>
   <p:notesSz cx="6858000" cy="9144000"/>
@@ -1127,7 +1127,7 @@
   </p:cSld>
   <p:clrMap bg1="lt1" tx1="dk1" bg2="lt2" tx2="dk2" accent1="accent1" accent2="accent2" accent3="accent3" accent4="accent4" accent5="accent5" accent6="accent6" hlink="hlink" folHlink="folHlink"/>
   <p:sldLayoutIdLst>
-    <p:sldLayoutId xmlns:r="http://schemas.openxmlformats.org/officeDocument/2006/relationships" id="2147483649" r:id="R71af096a133640e9"/>
+    <p:sldLayoutId xmlns:r="http://schemas.openxmlformats.org/officeDocument/2006/relationships" id="2147483649" r:id="R77648ec2d5fc4f84"/>
   </p:sldLayoutIdLst>
   <p:txStyles>
     <p:titleStyle>
@@ -1678,7 +1678,7 @@
           <p:cNvPr id="7" name="title-plane">
             <a:extLst xmlns:a="http://schemas.openxmlformats.org/drawingml/2006/main">
               <a:ext uri="{FF2B5EF4-FFF2-40B4-BE49-F238E27FC236}">
-                <a16:creationId xmlns:a16="http://schemas.microsoft.com/office/drawing/2014/main" id="{6D0B8972-7E60-46E3-A352-B4BB49CCFE09}"/>
+                <a16:creationId xmlns:a16="http://schemas.microsoft.com/office/drawing/2014/main" id="{F03D4BA9-F7C9-41BE-972E-DB746ACAD93F}"/>
               </a:ext>
             </a:extLst>
           </p:cNvPr>
@@ -1713,8 +1713,8 @@
           <p:nvPr/>
         </p:nvPicPr>
         <p:blipFill>
-          <a:blip xmlns:r="http://schemas.openxmlformats.org/officeDocument/2006/relationships" xmlns:a="http://schemas.openxmlformats.org/drawingml/2006/main" r:embed="R9c2fdad1f2984515"/>
-          <a:srcRect xmlns:a="http://schemas.openxmlformats.org/drawingml/2006/main" l="30134" t="0" r="30134" b="0"/>
+          <a:blip xmlns:r="http://schemas.openxmlformats.org/officeDocument/2006/relationships" xmlns:a="http://schemas.openxmlformats.org/drawingml/2006/main" r:embed="R96b6c5a6af804917"/>
+          <a:srcRect xmlns:a="http://schemas.openxmlformats.org/drawingml/2006/main" l="24074" t="0" r="24074" b="0"/>
           <a:stretch xmlns:a="http://schemas.openxmlformats.org/drawingml/2006/main">
             <a:fillRect l="0" t="0" r="0" b="0"/>
           </a:stretch>
@@ -1734,7 +1734,7 @@
           <p:cNvPr id="3" name="module-kicker">
             <a:extLst xmlns:a="http://schemas.openxmlformats.org/drawingml/2006/main">
               <a:ext uri="{FF2B5EF4-FFF2-40B4-BE49-F238E27FC236}">
-                <a16:creationId xmlns:a16="http://schemas.microsoft.com/office/drawing/2014/main" id="{24C7F513-3929-4B83-8561-9F737A7FE678}"/>
+                <a16:creationId xmlns:a16="http://schemas.microsoft.com/office/drawing/2014/main" id="{D47B7916-02E7-467C-B5DD-2997E5E2C86D}"/>
               </a:ext>
             </a:extLst>
           </p:cNvPr>
@@ -1784,7 +1784,7 @@
           <p:cNvPr id="4" name="deck-title">
             <a:extLst xmlns:a="http://schemas.openxmlformats.org/drawingml/2006/main">
               <a:ext uri="{FF2B5EF4-FFF2-40B4-BE49-F238E27FC236}">
-                <a16:creationId xmlns:a16="http://schemas.microsoft.com/office/drawing/2014/main" id="{B8965CAA-9561-47B9-8F47-B5213A50A8DF}"/>
+                <a16:creationId xmlns:a16="http://schemas.microsoft.com/office/drawing/2014/main" id="{83847697-2354-4C07-A79C-6F195B12B767}"/>
               </a:ext>
             </a:extLst>
           </p:cNvPr>
@@ -1834,7 +1834,7 @@
           <p:cNvPr id="5" name="deck-subtitle">
             <a:extLst xmlns:a="http://schemas.openxmlformats.org/drawingml/2006/main">
               <a:ext uri="{FF2B5EF4-FFF2-40B4-BE49-F238E27FC236}">
-                <a16:creationId xmlns:a16="http://schemas.microsoft.com/office/drawing/2014/main" id="{606144C7-5993-430C-B274-63AD4D27BF99}"/>
+                <a16:creationId xmlns:a16="http://schemas.microsoft.com/office/drawing/2014/main" id="{09156A4A-3A60-4198-92C8-F4CA95123ADB}"/>
               </a:ext>
             </a:extLst>
           </p:cNvPr>
@@ -1884,7 +1884,7 @@
           <p:cNvPr id="6" name="deck-footer">
             <a:extLst xmlns:a="http://schemas.openxmlformats.org/drawingml/2006/main">
               <a:ext uri="{FF2B5EF4-FFF2-40B4-BE49-F238E27FC236}">
-                <a16:creationId xmlns:a16="http://schemas.microsoft.com/office/drawing/2014/main" id="{278316AB-3E08-4B9A-96B7-A66FCD763B62}"/>
+                <a16:creationId xmlns:a16="http://schemas.microsoft.com/office/drawing/2014/main" id="{436DA4B0-8F00-4E4A-B30F-D792533EDDCE}"/>
               </a:ext>
             </a:extLst>
           </p:cNvPr>
@@ -1932,7 +1932,7 @@
     </p:spTree>
     <p:extLst>
       <p:ext uri="{BB962C8B-B14F-4D97-AF65-F5344CB8AC3E}">
-        <p14:creationId xmlns:p14="http://schemas.microsoft.com/office/powerpoint/2010/main" val="1786638758"/>
+        <p14:creationId xmlns:p14="http://schemas.microsoft.com/office/powerpoint/2010/main" val="882161373"/>
       </p:ext>
     </p:extLst>
   </p:cSld>
@@ -1963,7 +1963,7 @@
           <p:cNvPr id="15" name="top-rule">
             <a:extLst xmlns:a="http://schemas.openxmlformats.org/drawingml/2006/main">
               <a:ext uri="{FF2B5EF4-FFF2-40B4-BE49-F238E27FC236}">
-                <a16:creationId xmlns:a16="http://schemas.microsoft.com/office/drawing/2014/main" id="{FC6153B6-1E5B-4FF9-A21B-AD093E0EA4B4}"/>
+                <a16:creationId xmlns:a16="http://schemas.microsoft.com/office/drawing/2014/main" id="{F5DAEFA0-9A7B-42F8-B544-91B3A500990B}"/>
               </a:ext>
             </a:extLst>
           </p:cNvPr>
@@ -1994,7 +1994,7 @@
           <p:cNvPr id="2" name="course-label">
             <a:extLst xmlns:a="http://schemas.openxmlformats.org/drawingml/2006/main">
               <a:ext uri="{FF2B5EF4-FFF2-40B4-BE49-F238E27FC236}">
-                <a16:creationId xmlns:a16="http://schemas.microsoft.com/office/drawing/2014/main" id="{6A1673E6-5CEE-4D46-A38F-0E1580E89771}"/>
+                <a16:creationId xmlns:a16="http://schemas.microsoft.com/office/drawing/2014/main" id="{2A2AE605-27CF-4637-AF77-DDF4D0552DFD}"/>
               </a:ext>
             </a:extLst>
           </p:cNvPr>
@@ -2044,7 +2044,7 @@
           <p:cNvPr id="3" name="module-label">
             <a:extLst xmlns:a="http://schemas.openxmlformats.org/drawingml/2006/main">
               <a:ext uri="{FF2B5EF4-FFF2-40B4-BE49-F238E27FC236}">
-                <a16:creationId xmlns:a16="http://schemas.microsoft.com/office/drawing/2014/main" id="{D749FC6A-81CE-41DD-AB45-3B4B764BAFE6}"/>
+                <a16:creationId xmlns:a16="http://schemas.microsoft.com/office/drawing/2014/main" id="{91990FCC-ED03-4C21-97FB-D8209891C354}"/>
               </a:ext>
             </a:extLst>
           </p:cNvPr>
@@ -2094,7 +2094,7 @@
           <p:cNvPr id="4" name="slide-title">
             <a:extLst xmlns:a="http://schemas.openxmlformats.org/drawingml/2006/main">
               <a:ext uri="{FF2B5EF4-FFF2-40B4-BE49-F238E27FC236}">
-                <a16:creationId xmlns:a16="http://schemas.microsoft.com/office/drawing/2014/main" id="{F274A1C1-D51B-4949-9594-B5D887A27238}"/>
+                <a16:creationId xmlns:a16="http://schemas.microsoft.com/office/drawing/2014/main" id="{24401FB2-D076-4FFF-81B6-8DDC9727E3C7}"/>
               </a:ext>
             </a:extLst>
           </p:cNvPr>
@@ -2144,7 +2144,7 @@
           <p:cNvPr id="5" name="slide-subtitle">
             <a:extLst xmlns:a="http://schemas.openxmlformats.org/drawingml/2006/main">
               <a:ext uri="{FF2B5EF4-FFF2-40B4-BE49-F238E27FC236}">
-                <a16:creationId xmlns:a16="http://schemas.microsoft.com/office/drawing/2014/main" id="{B9B6D6B5-51DD-4A59-B6E6-6D51259ED5E0}"/>
+                <a16:creationId xmlns:a16="http://schemas.microsoft.com/office/drawing/2014/main" id="{E013D5F2-3C32-4964-BDC2-5BCE79BA17B7}"/>
               </a:ext>
             </a:extLst>
           </p:cNvPr>
@@ -2194,7 +2194,7 @@
           <p:cNvPr id="6" name="bullet-1">
             <a:extLst xmlns:a="http://schemas.openxmlformats.org/drawingml/2006/main">
               <a:ext uri="{FF2B5EF4-FFF2-40B4-BE49-F238E27FC236}">
-                <a16:creationId xmlns:a16="http://schemas.microsoft.com/office/drawing/2014/main" id="{FB4EBE5A-F472-4479-B7C2-B8162775E38A}"/>
+                <a16:creationId xmlns:a16="http://schemas.microsoft.com/office/drawing/2014/main" id="{1C6584E4-D923-46B0-84E9-4CBF18364793}"/>
               </a:ext>
             </a:extLst>
           </p:cNvPr>
@@ -2225,7 +2225,7 @@
           <p:cNvPr id="7" name="bullet-number-1">
             <a:extLst xmlns:a="http://schemas.openxmlformats.org/drawingml/2006/main">
               <a:ext uri="{FF2B5EF4-FFF2-40B4-BE49-F238E27FC236}">
-                <a16:creationId xmlns:a16="http://schemas.microsoft.com/office/drawing/2014/main" id="{A4EED974-20E8-444B-B84D-B168DB912D6A}"/>
+                <a16:creationId xmlns:a16="http://schemas.microsoft.com/office/drawing/2014/main" id="{B43AEE07-D533-4BB3-9B32-06636F606BE4}"/>
               </a:ext>
             </a:extLst>
           </p:cNvPr>
@@ -2275,7 +2275,7 @@
           <p:cNvPr id="8" name="bullet-copy-1">
             <a:extLst xmlns:a="http://schemas.openxmlformats.org/drawingml/2006/main">
               <a:ext uri="{FF2B5EF4-FFF2-40B4-BE49-F238E27FC236}">
-                <a16:creationId xmlns:a16="http://schemas.microsoft.com/office/drawing/2014/main" id="{96BA651E-48E6-41B9-A900-24FB948E2226}"/>
+                <a16:creationId xmlns:a16="http://schemas.microsoft.com/office/drawing/2014/main" id="{8A38BEFB-F9F7-41DF-B058-497DDD9B91CB}"/>
               </a:ext>
             </a:extLst>
           </p:cNvPr>
@@ -2325,7 +2325,7 @@
           <p:cNvPr id="9" name="bullet-2">
             <a:extLst xmlns:a="http://schemas.openxmlformats.org/drawingml/2006/main">
               <a:ext uri="{FF2B5EF4-FFF2-40B4-BE49-F238E27FC236}">
-                <a16:creationId xmlns:a16="http://schemas.microsoft.com/office/drawing/2014/main" id="{8D2C2A6B-6805-41AD-8DD2-FC63BD79D1E5}"/>
+                <a16:creationId xmlns:a16="http://schemas.microsoft.com/office/drawing/2014/main" id="{4F398BB6-A227-42AC-A2F9-60437B6AF39B}"/>
               </a:ext>
             </a:extLst>
           </p:cNvPr>
@@ -2356,7 +2356,7 @@
           <p:cNvPr id="10" name="bullet-number-2">
             <a:extLst xmlns:a="http://schemas.openxmlformats.org/drawingml/2006/main">
               <a:ext uri="{FF2B5EF4-FFF2-40B4-BE49-F238E27FC236}">
-                <a16:creationId xmlns:a16="http://schemas.microsoft.com/office/drawing/2014/main" id="{9185CBEF-2378-41D0-B2CD-1E522266A71F}"/>
+                <a16:creationId xmlns:a16="http://schemas.microsoft.com/office/drawing/2014/main" id="{5D5C97E9-4FA3-4A9D-86E2-F4E2D8CC745F}"/>
               </a:ext>
             </a:extLst>
           </p:cNvPr>
@@ -2406,7 +2406,7 @@
           <p:cNvPr id="11" name="bullet-copy-2">
             <a:extLst xmlns:a="http://schemas.openxmlformats.org/drawingml/2006/main">
               <a:ext uri="{FF2B5EF4-FFF2-40B4-BE49-F238E27FC236}">
-                <a16:creationId xmlns:a16="http://schemas.microsoft.com/office/drawing/2014/main" id="{E22A8A52-D8D4-4C15-B1B7-6CD6C0A04774}"/>
+                <a16:creationId xmlns:a16="http://schemas.microsoft.com/office/drawing/2014/main" id="{BFCB78A3-20E1-4B34-B227-058999F8F74B}"/>
               </a:ext>
             </a:extLst>
           </p:cNvPr>
@@ -2456,7 +2456,7 @@
           <p:cNvPr id="12" name="bullet-3">
             <a:extLst xmlns:a="http://schemas.openxmlformats.org/drawingml/2006/main">
               <a:ext uri="{FF2B5EF4-FFF2-40B4-BE49-F238E27FC236}">
-                <a16:creationId xmlns:a16="http://schemas.microsoft.com/office/drawing/2014/main" id="{659AD35E-EF23-4AC6-9F83-41C3686F68E3}"/>
+                <a16:creationId xmlns:a16="http://schemas.microsoft.com/office/drawing/2014/main" id="{BB4203D1-8F88-4D59-B463-1AA8854185BF}"/>
               </a:ext>
             </a:extLst>
           </p:cNvPr>
@@ -2487,7 +2487,7 @@
           <p:cNvPr id="13" name="bullet-number-3">
             <a:extLst xmlns:a="http://schemas.openxmlformats.org/drawingml/2006/main">
               <a:ext uri="{FF2B5EF4-FFF2-40B4-BE49-F238E27FC236}">
-                <a16:creationId xmlns:a16="http://schemas.microsoft.com/office/drawing/2014/main" id="{C40B71D3-5F4D-426A-9BC7-ECE2C2377065}"/>
+                <a16:creationId xmlns:a16="http://schemas.microsoft.com/office/drawing/2014/main" id="{0B9D2AF5-D520-4D67-8F79-F3CB2205A1F4}"/>
               </a:ext>
             </a:extLst>
           </p:cNvPr>
@@ -2537,7 +2537,7 @@
           <p:cNvPr id="14" name="bullet-copy-3">
             <a:extLst xmlns:a="http://schemas.openxmlformats.org/drawingml/2006/main">
               <a:ext uri="{FF2B5EF4-FFF2-40B4-BE49-F238E27FC236}">
-                <a16:creationId xmlns:a16="http://schemas.microsoft.com/office/drawing/2014/main" id="{DECB29A6-1DFE-45AB-A1BE-B1C2623B469E}"/>
+                <a16:creationId xmlns:a16="http://schemas.microsoft.com/office/drawing/2014/main" id="{6E29044D-BCBC-4F9A-B930-C164A3551C56}"/>
               </a:ext>
             </a:extLst>
           </p:cNvPr>
@@ -2585,7 +2585,7 @@
     </p:spTree>
     <p:extLst>
       <p:ext uri="{BB962C8B-B14F-4D97-AF65-F5344CB8AC3E}">
-        <p14:creationId xmlns:p14="http://schemas.microsoft.com/office/powerpoint/2010/main" val="1244972490"/>
+        <p14:creationId xmlns:p14="http://schemas.microsoft.com/office/powerpoint/2010/main" val="474746685"/>
       </p:ext>
     </p:extLst>
   </p:cSld>
@@ -2616,7 +2616,7 @@
           <p:cNvPr id="15" name="top-rule">
             <a:extLst xmlns:a="http://schemas.openxmlformats.org/drawingml/2006/main">
               <a:ext uri="{FF2B5EF4-FFF2-40B4-BE49-F238E27FC236}">
-                <a16:creationId xmlns:a16="http://schemas.microsoft.com/office/drawing/2014/main" id="{73499CE0-2FD1-4257-B79F-87024F7C9A97}"/>
+                <a16:creationId xmlns:a16="http://schemas.microsoft.com/office/drawing/2014/main" id="{7F4A74EF-637E-4762-983A-21C09DA93681}"/>
               </a:ext>
             </a:extLst>
           </p:cNvPr>
@@ -2647,7 +2647,7 @@
           <p:cNvPr id="2" name="course-label">
             <a:extLst xmlns:a="http://schemas.openxmlformats.org/drawingml/2006/main">
               <a:ext uri="{FF2B5EF4-FFF2-40B4-BE49-F238E27FC236}">
-                <a16:creationId xmlns:a16="http://schemas.microsoft.com/office/drawing/2014/main" id="{90E3F264-F509-4667-8D32-930A61FCACA5}"/>
+                <a16:creationId xmlns:a16="http://schemas.microsoft.com/office/drawing/2014/main" id="{26264E47-4112-4532-9197-B64EE8996B22}"/>
               </a:ext>
             </a:extLst>
           </p:cNvPr>
@@ -2697,7 +2697,7 @@
           <p:cNvPr id="3" name="module-label">
             <a:extLst xmlns:a="http://schemas.openxmlformats.org/drawingml/2006/main">
               <a:ext uri="{FF2B5EF4-FFF2-40B4-BE49-F238E27FC236}">
-                <a16:creationId xmlns:a16="http://schemas.microsoft.com/office/drawing/2014/main" id="{040957D8-FB7F-488C-929A-3448674F937E}"/>
+                <a16:creationId xmlns:a16="http://schemas.microsoft.com/office/drawing/2014/main" id="{8201152F-030A-4F5C-81CA-0622B9BF8ECB}"/>
               </a:ext>
             </a:extLst>
           </p:cNvPr>
@@ -2747,7 +2747,7 @@
           <p:cNvPr id="4" name="slide-title">
             <a:extLst xmlns:a="http://schemas.openxmlformats.org/drawingml/2006/main">
               <a:ext uri="{FF2B5EF4-FFF2-40B4-BE49-F238E27FC236}">
-                <a16:creationId xmlns:a16="http://schemas.microsoft.com/office/drawing/2014/main" id="{7398238B-9CF6-43F3-ACAC-514D6B3587F2}"/>
+                <a16:creationId xmlns:a16="http://schemas.microsoft.com/office/drawing/2014/main" id="{B588B0AE-48B3-4314-98BE-D913C6B6BD92}"/>
               </a:ext>
             </a:extLst>
           </p:cNvPr>
@@ -2797,7 +2797,7 @@
           <p:cNvPr id="5" name="slide-subtitle">
             <a:extLst xmlns:a="http://schemas.openxmlformats.org/drawingml/2006/main">
               <a:ext uri="{FF2B5EF4-FFF2-40B4-BE49-F238E27FC236}">
-                <a16:creationId xmlns:a16="http://schemas.microsoft.com/office/drawing/2014/main" id="{B6958C21-7B59-4C1B-BBC3-D1CFC0EBED91}"/>
+                <a16:creationId xmlns:a16="http://schemas.microsoft.com/office/drawing/2014/main" id="{5C4DAB0D-289F-4675-9CEC-3BB7C043C53F}"/>
               </a:ext>
             </a:extLst>
           </p:cNvPr>
@@ -2847,7 +2847,7 @@
           <p:cNvPr id="6" name="bullet-1">
             <a:extLst xmlns:a="http://schemas.openxmlformats.org/drawingml/2006/main">
               <a:ext uri="{FF2B5EF4-FFF2-40B4-BE49-F238E27FC236}">
-                <a16:creationId xmlns:a16="http://schemas.microsoft.com/office/drawing/2014/main" id="{182D2401-1BD3-4A87-9FB4-311A9B4DEC27}"/>
+                <a16:creationId xmlns:a16="http://schemas.microsoft.com/office/drawing/2014/main" id="{6DDFD60A-5869-4035-A1A8-7922E8B8A547}"/>
               </a:ext>
             </a:extLst>
           </p:cNvPr>
@@ -2878,7 +2878,7 @@
           <p:cNvPr id="7" name="bullet-number-1">
             <a:extLst xmlns:a="http://schemas.openxmlformats.org/drawingml/2006/main">
               <a:ext uri="{FF2B5EF4-FFF2-40B4-BE49-F238E27FC236}">
-                <a16:creationId xmlns:a16="http://schemas.microsoft.com/office/drawing/2014/main" id="{34155947-2C5A-44D5-B928-AD9A2922A88E}"/>
+                <a16:creationId xmlns:a16="http://schemas.microsoft.com/office/drawing/2014/main" id="{18969BC4-E038-41EA-B817-BC92A1FA221E}"/>
               </a:ext>
             </a:extLst>
           </p:cNvPr>
@@ -2928,7 +2928,7 @@
           <p:cNvPr id="8" name="bullet-copy-1">
             <a:extLst xmlns:a="http://schemas.openxmlformats.org/drawingml/2006/main">
               <a:ext uri="{FF2B5EF4-FFF2-40B4-BE49-F238E27FC236}">
-                <a16:creationId xmlns:a16="http://schemas.microsoft.com/office/drawing/2014/main" id="{8E12CDD7-4511-4634-A534-0FBE99293D45}"/>
+                <a16:creationId xmlns:a16="http://schemas.microsoft.com/office/drawing/2014/main" id="{80EBA1F0-E9A6-41D5-882F-2B75920550F1}"/>
               </a:ext>
             </a:extLst>
           </p:cNvPr>
@@ -2978,7 +2978,7 @@
           <p:cNvPr id="9" name="bullet-2">
             <a:extLst xmlns:a="http://schemas.openxmlformats.org/drawingml/2006/main">
               <a:ext uri="{FF2B5EF4-FFF2-40B4-BE49-F238E27FC236}">
-                <a16:creationId xmlns:a16="http://schemas.microsoft.com/office/drawing/2014/main" id="{4824C220-82D6-4DF2-9B8C-652DEA15EC95}"/>
+                <a16:creationId xmlns:a16="http://schemas.microsoft.com/office/drawing/2014/main" id="{FB6A4FC0-B210-40F7-AE19-AEA9CCADC27F}"/>
               </a:ext>
             </a:extLst>
           </p:cNvPr>
@@ -3009,7 +3009,7 @@
           <p:cNvPr id="10" name="bullet-number-2">
             <a:extLst xmlns:a="http://schemas.openxmlformats.org/drawingml/2006/main">
               <a:ext uri="{FF2B5EF4-FFF2-40B4-BE49-F238E27FC236}">
-                <a16:creationId xmlns:a16="http://schemas.microsoft.com/office/drawing/2014/main" id="{ADA765AA-D1AA-416C-9053-37697E771BE8}"/>
+                <a16:creationId xmlns:a16="http://schemas.microsoft.com/office/drawing/2014/main" id="{3F2F630A-0F66-459B-BC44-1B8000A871B4}"/>
               </a:ext>
             </a:extLst>
           </p:cNvPr>
@@ -3059,7 +3059,7 @@
           <p:cNvPr id="11" name="bullet-copy-2">
             <a:extLst xmlns:a="http://schemas.openxmlformats.org/drawingml/2006/main">
               <a:ext uri="{FF2B5EF4-FFF2-40B4-BE49-F238E27FC236}">
-                <a16:creationId xmlns:a16="http://schemas.microsoft.com/office/drawing/2014/main" id="{628A747D-9654-4034-9E7D-C298FE9F2057}"/>
+                <a16:creationId xmlns:a16="http://schemas.microsoft.com/office/drawing/2014/main" id="{04CC3476-D7A6-4A7A-9767-E15924D4EA39}"/>
               </a:ext>
             </a:extLst>
           </p:cNvPr>
@@ -3099,7 +3099,7 @@
                   <a:srgbClr val="16343A"/>
                 </a:solidFill>
               </a:rPr>
-              <a:t>Include time for measuring, marking, cutting, pinning, sewing, pressing, checking, recording evidence and cleaning.</a:t>
+              <a:t>It also identifies dependencies: decoration may need to be completed before a panel is joined, and a closure position may need checking before permanent stitching.</a:t>
             </a:r>
           </a:p>
         </p:txBody>
@@ -3109,7 +3109,7 @@
           <p:cNvPr id="12" name="bullet-3">
             <a:extLst xmlns:a="http://schemas.openxmlformats.org/drawingml/2006/main">
               <a:ext uri="{FF2B5EF4-FFF2-40B4-BE49-F238E27FC236}">
-                <a16:creationId xmlns:a16="http://schemas.microsoft.com/office/drawing/2014/main" id="{D5085035-E3F2-4EEB-8CA4-3D00424BD5EB}"/>
+                <a16:creationId xmlns:a16="http://schemas.microsoft.com/office/drawing/2014/main" id="{038481F2-FA42-4109-9AF0-577A8683DDE6}"/>
               </a:ext>
             </a:extLst>
           </p:cNvPr>
@@ -3140,7 +3140,7 @@
           <p:cNvPr id="13" name="bullet-number-3">
             <a:extLst xmlns:a="http://schemas.openxmlformats.org/drawingml/2006/main">
               <a:ext uri="{FF2B5EF4-FFF2-40B4-BE49-F238E27FC236}">
-                <a16:creationId xmlns:a16="http://schemas.microsoft.com/office/drawing/2014/main" id="{627E057E-F637-4DD0-AF33-047EC4877781}"/>
+                <a16:creationId xmlns:a16="http://schemas.microsoft.com/office/drawing/2014/main" id="{A42D9029-B4BF-4192-AC5E-AAD29C5E104E}"/>
               </a:ext>
             </a:extLst>
           </p:cNvPr>
@@ -3190,7 +3190,7 @@
           <p:cNvPr id="14" name="bullet-copy-3">
             <a:extLst xmlns:a="http://schemas.openxmlformats.org/drawingml/2006/main">
               <a:ext uri="{FF2B5EF4-FFF2-40B4-BE49-F238E27FC236}">
-                <a16:creationId xmlns:a16="http://schemas.microsoft.com/office/drawing/2014/main" id="{8F8600A7-4018-4C50-9D17-EE6A97C66353}"/>
+                <a16:creationId xmlns:a16="http://schemas.microsoft.com/office/drawing/2014/main" id="{ACD8F14C-DA5F-4895-AB59-46AE54AE3502}"/>
               </a:ext>
             </a:extLst>
           </p:cNvPr>
@@ -3230,7 +3230,7 @@
                   <a:srgbClr val="16343A"/>
                 </a:solidFill>
               </a:rPr>
-              <a:t>Use the teacher-approved lunch-bag instructions as the authority for exact pieces, dimensions, seam allowances, orientation and construction order.</a:t>
+              <a:t>Exact pieces, dimensions, seam allowances and construction order remain controlled by the teacher-approved instructions.</a:t>
             </a:r>
           </a:p>
         </p:txBody>
@@ -3238,7 +3238,7 @@
     </p:spTree>
     <p:extLst>
       <p:ext uri="{BB962C8B-B14F-4D97-AF65-F5344CB8AC3E}">
-        <p14:creationId xmlns:p14="http://schemas.microsoft.com/office/powerpoint/2010/main" val="166268243"/>
+        <p14:creationId xmlns:p14="http://schemas.microsoft.com/office/powerpoint/2010/main" val="602604054"/>
       </p:ext>
     </p:extLst>
   </p:cSld>
@@ -3269,7 +3269,7 @@
           <p:cNvPr id="12" name="top-rule">
             <a:extLst xmlns:a="http://schemas.openxmlformats.org/drawingml/2006/main">
               <a:ext uri="{FF2B5EF4-FFF2-40B4-BE49-F238E27FC236}">
-                <a16:creationId xmlns:a16="http://schemas.microsoft.com/office/drawing/2014/main" id="{A80B4846-F162-4A03-B80F-7A8F14522BD1}"/>
+                <a16:creationId xmlns:a16="http://schemas.microsoft.com/office/drawing/2014/main" id="{37025300-00FD-4083-BD87-F856E29DE77C}"/>
               </a:ext>
             </a:extLst>
           </p:cNvPr>
@@ -3300,7 +3300,7 @@
           <p:cNvPr id="2" name="course-label">
             <a:extLst xmlns:a="http://schemas.openxmlformats.org/drawingml/2006/main">
               <a:ext uri="{FF2B5EF4-FFF2-40B4-BE49-F238E27FC236}">
-                <a16:creationId xmlns:a16="http://schemas.microsoft.com/office/drawing/2014/main" id="{E18925A6-A482-422E-B827-E18C4DA27BFD}"/>
+                <a16:creationId xmlns:a16="http://schemas.microsoft.com/office/drawing/2014/main" id="{917C5A7B-940F-4050-ABA9-46E7192870C2}"/>
               </a:ext>
             </a:extLst>
           </p:cNvPr>
@@ -3350,7 +3350,7 @@
           <p:cNvPr id="3" name="module-label">
             <a:extLst xmlns:a="http://schemas.openxmlformats.org/drawingml/2006/main">
               <a:ext uri="{FF2B5EF4-FFF2-40B4-BE49-F238E27FC236}">
-                <a16:creationId xmlns:a16="http://schemas.microsoft.com/office/drawing/2014/main" id="{D494623B-7E1E-4A86-B14C-9574D679EF8F}"/>
+                <a16:creationId xmlns:a16="http://schemas.microsoft.com/office/drawing/2014/main" id="{E6D9BD52-A0F9-4911-9B3E-2E3F3A6626B6}"/>
               </a:ext>
             </a:extLst>
           </p:cNvPr>
@@ -3400,7 +3400,7 @@
           <p:cNvPr id="4" name="slide-title">
             <a:extLst xmlns:a="http://schemas.openxmlformats.org/drawingml/2006/main">
               <a:ext uri="{FF2B5EF4-FFF2-40B4-BE49-F238E27FC236}">
-                <a16:creationId xmlns:a16="http://schemas.microsoft.com/office/drawing/2014/main" id="{934232B9-D4AA-4622-AB33-43A811BBC9CD}"/>
+                <a16:creationId xmlns:a16="http://schemas.microsoft.com/office/drawing/2014/main" id="{03736C28-FB42-4DB7-A3FB-4F8BEB12B285}"/>
               </a:ext>
             </a:extLst>
           </p:cNvPr>
@@ -3450,7 +3450,7 @@
           <p:cNvPr id="5" name="slide-subtitle">
             <a:extLst xmlns:a="http://schemas.openxmlformats.org/drawingml/2006/main">
               <a:ext uri="{FF2B5EF4-FFF2-40B4-BE49-F238E27FC236}">
-                <a16:creationId xmlns:a16="http://schemas.microsoft.com/office/drawing/2014/main" id="{170A0BB0-32B7-405A-B462-CDC8ADEFA6B8}"/>
+                <a16:creationId xmlns:a16="http://schemas.microsoft.com/office/drawing/2014/main" id="{EB60E487-7136-4F88-B437-7CE3A04B5FF6}"/>
               </a:ext>
             </a:extLst>
           </p:cNvPr>
@@ -3500,7 +3500,7 @@
           <p:cNvPr id="6" name="prompt-accent">
             <a:extLst xmlns:a="http://schemas.openxmlformats.org/drawingml/2006/main">
               <a:ext uri="{FF2B5EF4-FFF2-40B4-BE49-F238E27FC236}">
-                <a16:creationId xmlns:a16="http://schemas.microsoft.com/office/drawing/2014/main" id="{C0264D87-0B5D-45F1-9DDC-756F29ACE39F}"/>
+                <a16:creationId xmlns:a16="http://schemas.microsoft.com/office/drawing/2014/main" id="{5F6C36AA-0EBA-4E7C-A286-594C5ACDFC8C}"/>
               </a:ext>
             </a:extLst>
           </p:cNvPr>
@@ -3531,7 +3531,7 @@
           <p:cNvPr id="7" name="plain-language">
             <a:extLst xmlns:a="http://schemas.openxmlformats.org/drawingml/2006/main">
               <a:ext uri="{FF2B5EF4-FFF2-40B4-BE49-F238E27FC236}">
-                <a16:creationId xmlns:a16="http://schemas.microsoft.com/office/drawing/2014/main" id="{5CDDB451-34A8-4A13-A259-EA3F0C7B0FB3}"/>
+                <a16:creationId xmlns:a16="http://schemas.microsoft.com/office/drawing/2014/main" id="{B04851A0-F10C-4664-8F30-598A54D70D6C}"/>
               </a:ext>
             </a:extLst>
           </p:cNvPr>
@@ -3581,7 +3581,7 @@
           <p:cNvPr id="8" name="clarify">
             <a:extLst xmlns:a="http://schemas.openxmlformats.org/drawingml/2006/main">
               <a:ext uri="{FF2B5EF4-FFF2-40B4-BE49-F238E27FC236}">
-                <a16:creationId xmlns:a16="http://schemas.microsoft.com/office/drawing/2014/main" id="{92AED761-CE2F-4EB1-9250-94C8FD35194F}"/>
+                <a16:creationId xmlns:a16="http://schemas.microsoft.com/office/drawing/2014/main" id="{0B0FADE5-3F22-4F54-942E-36950612744F}"/>
               </a:ext>
             </a:extLst>
           </p:cNvPr>
@@ -3631,7 +3631,7 @@
           <p:cNvPr id="9" name="starter-label">
             <a:extLst xmlns:a="http://schemas.openxmlformats.org/drawingml/2006/main">
               <a:ext uri="{FF2B5EF4-FFF2-40B4-BE49-F238E27FC236}">
-                <a16:creationId xmlns:a16="http://schemas.microsoft.com/office/drawing/2014/main" id="{52CA3F94-B9CE-401A-9DB1-1DA8C569B236}"/>
+                <a16:creationId xmlns:a16="http://schemas.microsoft.com/office/drawing/2014/main" id="{9EC3A77C-DE9C-4DCC-B560-56B5CBD7F823}"/>
               </a:ext>
             </a:extLst>
           </p:cNvPr>
@@ -3681,7 +3681,7 @@
           <p:cNvPr id="10" name="starter">
             <a:extLst xmlns:a="http://schemas.openxmlformats.org/drawingml/2006/main">
               <a:ext uri="{FF2B5EF4-FFF2-40B4-BE49-F238E27FC236}">
-                <a16:creationId xmlns:a16="http://schemas.microsoft.com/office/drawing/2014/main" id="{2D1B7221-AF5A-4EAC-A66D-45622F1CE1C2}"/>
+                <a16:creationId xmlns:a16="http://schemas.microsoft.com/office/drawing/2014/main" id="{EAD07263-0F98-4CFD-9292-7EE62F67BC18}"/>
               </a:ext>
             </a:extLst>
           </p:cNvPr>
@@ -3731,7 +3731,7 @@
           <p:cNvPr id="11" name="action">
             <a:extLst xmlns:a="http://schemas.openxmlformats.org/drawingml/2006/main">
               <a:ext uri="{FF2B5EF4-FFF2-40B4-BE49-F238E27FC236}">
-                <a16:creationId xmlns:a16="http://schemas.microsoft.com/office/drawing/2014/main" id="{97DBA0C9-6453-45FD-BACF-F5651B2E4B33}"/>
+                <a16:creationId xmlns:a16="http://schemas.microsoft.com/office/drawing/2014/main" id="{C067EFAD-C68B-49D1-A33F-97AEEE38ACE6}"/>
               </a:ext>
             </a:extLst>
           </p:cNvPr>
@@ -3779,7 +3779,7 @@
     </p:spTree>
     <p:extLst>
       <p:ext uri="{BB962C8B-B14F-4D97-AF65-F5344CB8AC3E}">
-        <p14:creationId xmlns:p14="http://schemas.microsoft.com/office/powerpoint/2010/main" val="1760910677"/>
+        <p14:creationId xmlns:p14="http://schemas.microsoft.com/office/powerpoint/2010/main" val="401758544"/>
       </p:ext>
     </p:extLst>
   </p:cSld>
@@ -3810,7 +3810,7 @@
           <p:cNvPr id="15" name="top-rule">
             <a:extLst xmlns:a="http://schemas.openxmlformats.org/drawingml/2006/main">
               <a:ext uri="{FF2B5EF4-FFF2-40B4-BE49-F238E27FC236}">
-                <a16:creationId xmlns:a16="http://schemas.microsoft.com/office/drawing/2014/main" id="{303DA938-7458-4997-BC73-59BF3F2D2500}"/>
+                <a16:creationId xmlns:a16="http://schemas.microsoft.com/office/drawing/2014/main" id="{079A9A91-5546-45AC-9B90-560EBA3C888A}"/>
               </a:ext>
             </a:extLst>
           </p:cNvPr>
@@ -3841,7 +3841,7 @@
           <p:cNvPr id="2" name="course-label">
             <a:extLst xmlns:a="http://schemas.openxmlformats.org/drawingml/2006/main">
               <a:ext uri="{FF2B5EF4-FFF2-40B4-BE49-F238E27FC236}">
-                <a16:creationId xmlns:a16="http://schemas.microsoft.com/office/drawing/2014/main" id="{DE8290DD-C9B9-4D99-A316-611817F3F912}"/>
+                <a16:creationId xmlns:a16="http://schemas.microsoft.com/office/drawing/2014/main" id="{361E67A4-EA45-4D31-A467-A2F43099DC45}"/>
               </a:ext>
             </a:extLst>
           </p:cNvPr>
@@ -3891,7 +3891,7 @@
           <p:cNvPr id="3" name="module-label">
             <a:extLst xmlns:a="http://schemas.openxmlformats.org/drawingml/2006/main">
               <a:ext uri="{FF2B5EF4-FFF2-40B4-BE49-F238E27FC236}">
-                <a16:creationId xmlns:a16="http://schemas.microsoft.com/office/drawing/2014/main" id="{99F82E77-D36F-4718-84AC-D1251E71005C}"/>
+                <a16:creationId xmlns:a16="http://schemas.microsoft.com/office/drawing/2014/main" id="{E3409FFD-F44F-40F1-B6ED-9C3634E7486C}"/>
               </a:ext>
             </a:extLst>
           </p:cNvPr>
@@ -3941,7 +3941,7 @@
           <p:cNvPr id="4" name="slide-title">
             <a:extLst xmlns:a="http://schemas.openxmlformats.org/drawingml/2006/main">
               <a:ext uri="{FF2B5EF4-FFF2-40B4-BE49-F238E27FC236}">
-                <a16:creationId xmlns:a16="http://schemas.microsoft.com/office/drawing/2014/main" id="{F92BCCA9-4CDD-4A26-B987-D64457813767}"/>
+                <a16:creationId xmlns:a16="http://schemas.microsoft.com/office/drawing/2014/main" id="{1379A81B-811B-4C8E-912B-BBD27480883C}"/>
               </a:ext>
             </a:extLst>
           </p:cNvPr>
@@ -3991,7 +3991,7 @@
           <p:cNvPr id="5" name="slide-subtitle">
             <a:extLst xmlns:a="http://schemas.openxmlformats.org/drawingml/2006/main">
               <a:ext uri="{FF2B5EF4-FFF2-40B4-BE49-F238E27FC236}">
-                <a16:creationId xmlns:a16="http://schemas.microsoft.com/office/drawing/2014/main" id="{0CA9E9CE-9AA5-441E-9D68-503C0FBAD2D3}"/>
+                <a16:creationId xmlns:a16="http://schemas.microsoft.com/office/drawing/2014/main" id="{8AAC2F52-43DE-4ACF-9835-B59C797F2C6E}"/>
               </a:ext>
             </a:extLst>
           </p:cNvPr>
@@ -4041,7 +4041,7 @@
           <p:cNvPr id="6" name="bullet-1">
             <a:extLst xmlns:a="http://schemas.openxmlformats.org/drawingml/2006/main">
               <a:ext uri="{FF2B5EF4-FFF2-40B4-BE49-F238E27FC236}">
-                <a16:creationId xmlns:a16="http://schemas.microsoft.com/office/drawing/2014/main" id="{5DFAD326-A2E7-4DBC-9324-2614D3F7DC99}"/>
+                <a16:creationId xmlns:a16="http://schemas.microsoft.com/office/drawing/2014/main" id="{27BD0612-304A-4BD2-B3A6-C787ABAD9398}"/>
               </a:ext>
             </a:extLst>
           </p:cNvPr>
@@ -4072,7 +4072,7 @@
           <p:cNvPr id="7" name="bullet-number-1">
             <a:extLst xmlns:a="http://schemas.openxmlformats.org/drawingml/2006/main">
               <a:ext uri="{FF2B5EF4-FFF2-40B4-BE49-F238E27FC236}">
-                <a16:creationId xmlns:a16="http://schemas.microsoft.com/office/drawing/2014/main" id="{4B3BA78C-99A4-4583-B7B9-04E12842052D}"/>
+                <a16:creationId xmlns:a16="http://schemas.microsoft.com/office/drawing/2014/main" id="{8203F63E-A489-4304-9448-B256604DCBAD}"/>
               </a:ext>
             </a:extLst>
           </p:cNvPr>
@@ -4122,7 +4122,7 @@
           <p:cNvPr id="8" name="bullet-copy-1">
             <a:extLst xmlns:a="http://schemas.openxmlformats.org/drawingml/2006/main">
               <a:ext uri="{FF2B5EF4-FFF2-40B4-BE49-F238E27FC236}">
-                <a16:creationId xmlns:a16="http://schemas.microsoft.com/office/drawing/2014/main" id="{581C3B46-59E7-4F9F-9124-236BBD611D80}"/>
+                <a16:creationId xmlns:a16="http://schemas.microsoft.com/office/drawing/2014/main" id="{2AF91B63-0EB2-4AD6-86F3-8DAE417793AE}"/>
               </a:ext>
             </a:extLst>
           </p:cNvPr>
@@ -4172,7 +4172,7 @@
           <p:cNvPr id="9" name="bullet-2">
             <a:extLst xmlns:a="http://schemas.openxmlformats.org/drawingml/2006/main">
               <a:ext uri="{FF2B5EF4-FFF2-40B4-BE49-F238E27FC236}">
-                <a16:creationId xmlns:a16="http://schemas.microsoft.com/office/drawing/2014/main" id="{CC337D92-08DD-4E4D-BE7B-09D99710A75D}"/>
+                <a16:creationId xmlns:a16="http://schemas.microsoft.com/office/drawing/2014/main" id="{7CA7314B-AEC6-4760-8B5C-64D9535A387A}"/>
               </a:ext>
             </a:extLst>
           </p:cNvPr>
@@ -4203,7 +4203,7 @@
           <p:cNvPr id="10" name="bullet-number-2">
             <a:extLst xmlns:a="http://schemas.openxmlformats.org/drawingml/2006/main">
               <a:ext uri="{FF2B5EF4-FFF2-40B4-BE49-F238E27FC236}">
-                <a16:creationId xmlns:a16="http://schemas.microsoft.com/office/drawing/2014/main" id="{8B08BE61-117C-4007-8EB9-6BBA8FCBD1CD}"/>
+                <a16:creationId xmlns:a16="http://schemas.microsoft.com/office/drawing/2014/main" id="{AF2E47AB-3CDB-43FD-9901-DEC592EA74BC}"/>
               </a:ext>
             </a:extLst>
           </p:cNvPr>
@@ -4253,7 +4253,7 @@
           <p:cNvPr id="11" name="bullet-copy-2">
             <a:extLst xmlns:a="http://schemas.openxmlformats.org/drawingml/2006/main">
               <a:ext uri="{FF2B5EF4-FFF2-40B4-BE49-F238E27FC236}">
-                <a16:creationId xmlns:a16="http://schemas.microsoft.com/office/drawing/2014/main" id="{80F72702-95A5-4E39-943C-5C2C209DDFC5}"/>
+                <a16:creationId xmlns:a16="http://schemas.microsoft.com/office/drawing/2014/main" id="{BD8E1E73-8AA7-45F2-9E8A-731B58B58331}"/>
               </a:ext>
             </a:extLst>
           </p:cNvPr>
@@ -4293,7 +4293,7 @@
                   <a:srgbClr val="16343A"/>
                 </a:solidFill>
               </a:rPr>
-              <a:t>Confirm fabric orientation, match edges, keep pins placed as demonstrated, use the approved seam guide and remove pins safely.</a:t>
+              <a:t>Use "measure or align twice, make once" before irreversible actions.</a:t>
             </a:r>
           </a:p>
         </p:txBody>
@@ -4303,7 +4303,7 @@
           <p:cNvPr id="12" name="bullet-3">
             <a:extLst xmlns:a="http://schemas.openxmlformats.org/drawingml/2006/main">
               <a:ext uri="{FF2B5EF4-FFF2-40B4-BE49-F238E27FC236}">
-                <a16:creationId xmlns:a16="http://schemas.microsoft.com/office/drawing/2014/main" id="{80E36459-A211-44BB-AC0C-8AFA248D3E38}"/>
+                <a16:creationId xmlns:a16="http://schemas.microsoft.com/office/drawing/2014/main" id="{E52D44F6-B700-4AFD-A55B-6BFA813E1595}"/>
               </a:ext>
             </a:extLst>
           </p:cNvPr>
@@ -4334,7 +4334,7 @@
           <p:cNvPr id="13" name="bullet-number-3">
             <a:extLst xmlns:a="http://schemas.openxmlformats.org/drawingml/2006/main">
               <a:ext uri="{FF2B5EF4-FFF2-40B4-BE49-F238E27FC236}">
-                <a16:creationId xmlns:a16="http://schemas.microsoft.com/office/drawing/2014/main" id="{00794DEC-9E82-46C0-B1A2-FE12BF7272E8}"/>
+                <a16:creationId xmlns:a16="http://schemas.microsoft.com/office/drawing/2014/main" id="{B14C973C-AF11-4CD2-8A90-CC8914384BE7}"/>
               </a:ext>
             </a:extLst>
           </p:cNvPr>
@@ -4384,7 +4384,7 @@
           <p:cNvPr id="14" name="bullet-copy-3">
             <a:extLst xmlns:a="http://schemas.openxmlformats.org/drawingml/2006/main">
               <a:ext uri="{FF2B5EF4-FFF2-40B4-BE49-F238E27FC236}">
-                <a16:creationId xmlns:a16="http://schemas.microsoft.com/office/drawing/2014/main" id="{1A68E8B6-ECFE-4B5A-8F6A-5CC575182362}"/>
+                <a16:creationId xmlns:a16="http://schemas.microsoft.com/office/drawing/2014/main" id="{9AADD663-E230-4D68-9C03-27C819563D31}"/>
               </a:ext>
             </a:extLst>
           </p:cNvPr>
@@ -4424,7 +4424,7 @@
                   <a:srgbClr val="16343A"/>
                 </a:solidFill>
               </a:rPr>
-              <a:t>Press only when instructed and suitable for the material.</a:t>
+              <a:t>A well-recorded correction shows that the maker noticed evidence, protected the project and made a reasoned decision.</a:t>
             </a:r>
           </a:p>
         </p:txBody>
@@ -4432,7 +4432,7 @@
     </p:spTree>
     <p:extLst>
       <p:ext uri="{BB962C8B-B14F-4D97-AF65-F5344CB8AC3E}">
-        <p14:creationId xmlns:p14="http://schemas.microsoft.com/office/powerpoint/2010/main" val="1251856982"/>
+        <p14:creationId xmlns:p14="http://schemas.microsoft.com/office/powerpoint/2010/main" val="1784159675"/>
       </p:ext>
     </p:extLst>
   </p:cSld>
@@ -4463,7 +4463,7 @@
           <p:cNvPr id="12" name="top-rule">
             <a:extLst xmlns:a="http://schemas.openxmlformats.org/drawingml/2006/main">
               <a:ext uri="{FF2B5EF4-FFF2-40B4-BE49-F238E27FC236}">
-                <a16:creationId xmlns:a16="http://schemas.microsoft.com/office/drawing/2014/main" id="{7CA4A632-DE82-4890-B8D0-5814839BBB83}"/>
+                <a16:creationId xmlns:a16="http://schemas.microsoft.com/office/drawing/2014/main" id="{58B0ECBC-D796-4D02-A72C-72C539933257}"/>
               </a:ext>
             </a:extLst>
           </p:cNvPr>
@@ -4494,7 +4494,7 @@
           <p:cNvPr id="2" name="course-label">
             <a:extLst xmlns:a="http://schemas.openxmlformats.org/drawingml/2006/main">
               <a:ext uri="{FF2B5EF4-FFF2-40B4-BE49-F238E27FC236}">
-                <a16:creationId xmlns:a16="http://schemas.microsoft.com/office/drawing/2014/main" id="{19AE3AF2-ADE4-44F3-8DC8-6DBD01424A95}"/>
+                <a16:creationId xmlns:a16="http://schemas.microsoft.com/office/drawing/2014/main" id="{870B5EEF-7A99-466D-9194-529787D7657C}"/>
               </a:ext>
             </a:extLst>
           </p:cNvPr>
@@ -4544,7 +4544,7 @@
           <p:cNvPr id="3" name="module-label">
             <a:extLst xmlns:a="http://schemas.openxmlformats.org/drawingml/2006/main">
               <a:ext uri="{FF2B5EF4-FFF2-40B4-BE49-F238E27FC236}">
-                <a16:creationId xmlns:a16="http://schemas.microsoft.com/office/drawing/2014/main" id="{13F2774F-693C-4E40-9BD0-7E215BAD0395}"/>
+                <a16:creationId xmlns:a16="http://schemas.microsoft.com/office/drawing/2014/main" id="{AEBCCD4C-F89E-4F74-960D-E187D5AE2707}"/>
               </a:ext>
             </a:extLst>
           </p:cNvPr>
@@ -4594,7 +4594,7 @@
           <p:cNvPr id="4" name="slide-title">
             <a:extLst xmlns:a="http://schemas.openxmlformats.org/drawingml/2006/main">
               <a:ext uri="{FF2B5EF4-FFF2-40B4-BE49-F238E27FC236}">
-                <a16:creationId xmlns:a16="http://schemas.microsoft.com/office/drawing/2014/main" id="{B5FF65DE-6D55-4ACD-BB76-63C221621A3F}"/>
+                <a16:creationId xmlns:a16="http://schemas.microsoft.com/office/drawing/2014/main" id="{EDE3BD12-C1D5-4FD1-863A-FA010F8FA57C}"/>
               </a:ext>
             </a:extLst>
           </p:cNvPr>
@@ -4644,7 +4644,7 @@
           <p:cNvPr id="5" name="slide-subtitle">
             <a:extLst xmlns:a="http://schemas.openxmlformats.org/drawingml/2006/main">
               <a:ext uri="{FF2B5EF4-FFF2-40B4-BE49-F238E27FC236}">
-                <a16:creationId xmlns:a16="http://schemas.microsoft.com/office/drawing/2014/main" id="{B8D7BCF7-3764-488E-8D63-5102A031A243}"/>
+                <a16:creationId xmlns:a16="http://schemas.microsoft.com/office/drawing/2014/main" id="{B23BB7C8-9530-48AA-A6AB-B30BA5F24D2F}"/>
               </a:ext>
             </a:extLst>
           </p:cNvPr>
@@ -4694,7 +4694,7 @@
           <p:cNvPr id="6" name="prompt-accent">
             <a:extLst xmlns:a="http://schemas.openxmlformats.org/drawingml/2006/main">
               <a:ext uri="{FF2B5EF4-FFF2-40B4-BE49-F238E27FC236}">
-                <a16:creationId xmlns:a16="http://schemas.microsoft.com/office/drawing/2014/main" id="{A0BB97F0-F93A-45BF-B4CB-872671EE2D9A}"/>
+                <a16:creationId xmlns:a16="http://schemas.microsoft.com/office/drawing/2014/main" id="{FBBB4371-C8A6-4CE3-8D41-8EE853F51E42}"/>
               </a:ext>
             </a:extLst>
           </p:cNvPr>
@@ -4725,7 +4725,7 @@
           <p:cNvPr id="7" name="plain-language">
             <a:extLst xmlns:a="http://schemas.openxmlformats.org/drawingml/2006/main">
               <a:ext uri="{FF2B5EF4-FFF2-40B4-BE49-F238E27FC236}">
-                <a16:creationId xmlns:a16="http://schemas.microsoft.com/office/drawing/2014/main" id="{7D86C5EB-B2EA-4322-B204-994159ED5981}"/>
+                <a16:creationId xmlns:a16="http://schemas.microsoft.com/office/drawing/2014/main" id="{72E5B41C-F01B-4CFF-953C-A1265D5F89F3}"/>
               </a:ext>
             </a:extLst>
           </p:cNvPr>
@@ -4775,7 +4775,7 @@
           <p:cNvPr id="8" name="clarify">
             <a:extLst xmlns:a="http://schemas.openxmlformats.org/drawingml/2006/main">
               <a:ext uri="{FF2B5EF4-FFF2-40B4-BE49-F238E27FC236}">
-                <a16:creationId xmlns:a16="http://schemas.microsoft.com/office/drawing/2014/main" id="{BF8135D4-5EEF-4B55-9516-8A5820671AA2}"/>
+                <a16:creationId xmlns:a16="http://schemas.microsoft.com/office/drawing/2014/main" id="{8685AEA6-40CA-4ACE-A18B-97FD5E56E4A5}"/>
               </a:ext>
             </a:extLst>
           </p:cNvPr>
@@ -4825,7 +4825,7 @@
           <p:cNvPr id="9" name="starter-label">
             <a:extLst xmlns:a="http://schemas.openxmlformats.org/drawingml/2006/main">
               <a:ext uri="{FF2B5EF4-FFF2-40B4-BE49-F238E27FC236}">
-                <a16:creationId xmlns:a16="http://schemas.microsoft.com/office/drawing/2014/main" id="{55A6291C-4D2E-4DEA-B790-AE31C3263FC5}"/>
+                <a16:creationId xmlns:a16="http://schemas.microsoft.com/office/drawing/2014/main" id="{B7288832-1F1B-4D4D-8ED9-062DEB0A2F2B}"/>
               </a:ext>
             </a:extLst>
           </p:cNvPr>
@@ -4875,7 +4875,7 @@
           <p:cNvPr id="10" name="starter">
             <a:extLst xmlns:a="http://schemas.openxmlformats.org/drawingml/2006/main">
               <a:ext uri="{FF2B5EF4-FFF2-40B4-BE49-F238E27FC236}">
-                <a16:creationId xmlns:a16="http://schemas.microsoft.com/office/drawing/2014/main" id="{95DA9159-2EB5-4523-AB18-077B3C256105}"/>
+                <a16:creationId xmlns:a16="http://schemas.microsoft.com/office/drawing/2014/main" id="{40213DFD-5E8C-4B8F-89E3-4E5D1A72BA1A}"/>
               </a:ext>
             </a:extLst>
           </p:cNvPr>
@@ -4925,7 +4925,7 @@
           <p:cNvPr id="11" name="action">
             <a:extLst xmlns:a="http://schemas.openxmlformats.org/drawingml/2006/main">
               <a:ext uri="{FF2B5EF4-FFF2-40B4-BE49-F238E27FC236}">
-                <a16:creationId xmlns:a16="http://schemas.microsoft.com/office/drawing/2014/main" id="{54565A22-3CD5-4361-AEA0-DD49B78241B8}"/>
+                <a16:creationId xmlns:a16="http://schemas.microsoft.com/office/drawing/2014/main" id="{2A221A14-4B44-46E3-B9D5-6E0575FEFE26}"/>
               </a:ext>
             </a:extLst>
           </p:cNvPr>
@@ -4973,7 +4973,7 @@
     </p:spTree>
     <p:extLst>
       <p:ext uri="{BB962C8B-B14F-4D97-AF65-F5344CB8AC3E}">
-        <p14:creationId xmlns:p14="http://schemas.microsoft.com/office/powerpoint/2010/main" val="301837159"/>
+        <p14:creationId xmlns:p14="http://schemas.microsoft.com/office/powerpoint/2010/main" val="1853605414"/>
       </p:ext>
     </p:extLst>
   </p:cSld>
@@ -5004,7 +5004,7 @@
           <p:cNvPr id="15" name="top-rule">
             <a:extLst xmlns:a="http://schemas.openxmlformats.org/drawingml/2006/main">
               <a:ext uri="{FF2B5EF4-FFF2-40B4-BE49-F238E27FC236}">
-                <a16:creationId xmlns:a16="http://schemas.microsoft.com/office/drawing/2014/main" id="{962A8F50-A756-4A7D-838B-E1EEEB37930A}"/>
+                <a16:creationId xmlns:a16="http://schemas.microsoft.com/office/drawing/2014/main" id="{5B7DFD99-0AFC-4A5C-9CE0-89D5800C3F21}"/>
               </a:ext>
             </a:extLst>
           </p:cNvPr>
@@ -5035,7 +5035,7 @@
           <p:cNvPr id="2" name="course-label">
             <a:extLst xmlns:a="http://schemas.openxmlformats.org/drawingml/2006/main">
               <a:ext uri="{FF2B5EF4-FFF2-40B4-BE49-F238E27FC236}">
-                <a16:creationId xmlns:a16="http://schemas.microsoft.com/office/drawing/2014/main" id="{92E60C5C-CA3A-48F7-BE55-59CFBC287E10}"/>
+                <a16:creationId xmlns:a16="http://schemas.microsoft.com/office/drawing/2014/main" id="{690731C3-9CF0-455B-B6C0-F6160556F378}"/>
               </a:ext>
             </a:extLst>
           </p:cNvPr>
@@ -5085,7 +5085,7 @@
           <p:cNvPr id="3" name="module-label">
             <a:extLst xmlns:a="http://schemas.openxmlformats.org/drawingml/2006/main">
               <a:ext uri="{FF2B5EF4-FFF2-40B4-BE49-F238E27FC236}">
-                <a16:creationId xmlns:a16="http://schemas.microsoft.com/office/drawing/2014/main" id="{8D1E759B-1F62-429D-A39A-A6A29D2CFE82}"/>
+                <a16:creationId xmlns:a16="http://schemas.microsoft.com/office/drawing/2014/main" id="{34E2B3AD-8B8F-40A2-9DE5-EC7329D34154}"/>
               </a:ext>
             </a:extLst>
           </p:cNvPr>
@@ -5135,7 +5135,7 @@
           <p:cNvPr id="4" name="slide-title">
             <a:extLst xmlns:a="http://schemas.openxmlformats.org/drawingml/2006/main">
               <a:ext uri="{FF2B5EF4-FFF2-40B4-BE49-F238E27FC236}">
-                <a16:creationId xmlns:a16="http://schemas.microsoft.com/office/drawing/2014/main" id="{F8A64523-6C9B-40AE-B003-3BD9FDD00A1D}"/>
+                <a16:creationId xmlns:a16="http://schemas.microsoft.com/office/drawing/2014/main" id="{59232942-B2DD-445D-9043-F26F297D2F8A}"/>
               </a:ext>
             </a:extLst>
           </p:cNvPr>
@@ -5185,7 +5185,7 @@
           <p:cNvPr id="5" name="slide-subtitle">
             <a:extLst xmlns:a="http://schemas.openxmlformats.org/drawingml/2006/main">
               <a:ext uri="{FF2B5EF4-FFF2-40B4-BE49-F238E27FC236}">
-                <a16:creationId xmlns:a16="http://schemas.microsoft.com/office/drawing/2014/main" id="{676B37EB-D80A-489A-96D2-305BF0977664}"/>
+                <a16:creationId xmlns:a16="http://schemas.microsoft.com/office/drawing/2014/main" id="{1BEAF187-605D-4D8E-9FAA-29AF90307306}"/>
               </a:ext>
             </a:extLst>
           </p:cNvPr>
@@ -5235,7 +5235,7 @@
           <p:cNvPr id="6" name="bullet-1">
             <a:extLst xmlns:a="http://schemas.openxmlformats.org/drawingml/2006/main">
               <a:ext uri="{FF2B5EF4-FFF2-40B4-BE49-F238E27FC236}">
-                <a16:creationId xmlns:a16="http://schemas.microsoft.com/office/drawing/2014/main" id="{A7EB0782-9ACF-4684-A307-8A5B0B489287}"/>
+                <a16:creationId xmlns:a16="http://schemas.microsoft.com/office/drawing/2014/main" id="{54C30207-A56B-4752-962F-EB2747667D4D}"/>
               </a:ext>
             </a:extLst>
           </p:cNvPr>
@@ -5266,7 +5266,7 @@
           <p:cNvPr id="7" name="bullet-number-1">
             <a:extLst xmlns:a="http://schemas.openxmlformats.org/drawingml/2006/main">
               <a:ext uri="{FF2B5EF4-FFF2-40B4-BE49-F238E27FC236}">
-                <a16:creationId xmlns:a16="http://schemas.microsoft.com/office/drawing/2014/main" id="{46FC0721-D201-47A2-8730-5B34E5AA688F}"/>
+                <a16:creationId xmlns:a16="http://schemas.microsoft.com/office/drawing/2014/main" id="{8D59F14E-8FB2-401D-BCF6-0B9743149807}"/>
               </a:ext>
             </a:extLst>
           </p:cNvPr>
@@ -5316,7 +5316,7 @@
           <p:cNvPr id="8" name="bullet-copy-1">
             <a:extLst xmlns:a="http://schemas.openxmlformats.org/drawingml/2006/main">
               <a:ext uri="{FF2B5EF4-FFF2-40B4-BE49-F238E27FC236}">
-                <a16:creationId xmlns:a16="http://schemas.microsoft.com/office/drawing/2014/main" id="{4B9E82B7-EB64-46C6-AC8D-07977CE2C88C}"/>
+                <a16:creationId xmlns:a16="http://schemas.microsoft.com/office/drawing/2014/main" id="{07BFC12E-6D42-48F6-86AC-111B8C4DED6C}"/>
               </a:ext>
             </a:extLst>
           </p:cNvPr>
@@ -5366,7 +5366,7 @@
           <p:cNvPr id="9" name="bullet-2">
             <a:extLst xmlns:a="http://schemas.openxmlformats.org/drawingml/2006/main">
               <a:ext uri="{FF2B5EF4-FFF2-40B4-BE49-F238E27FC236}">
-                <a16:creationId xmlns:a16="http://schemas.microsoft.com/office/drawing/2014/main" id="{90B7E531-9604-4AD8-8AB0-1DE084E0F384}"/>
+                <a16:creationId xmlns:a16="http://schemas.microsoft.com/office/drawing/2014/main" id="{A949A161-B227-4207-8A22-F0F55CA6DFCF}"/>
               </a:ext>
             </a:extLst>
           </p:cNvPr>
@@ -5397,7 +5397,7 @@
           <p:cNvPr id="10" name="bullet-number-2">
             <a:extLst xmlns:a="http://schemas.openxmlformats.org/drawingml/2006/main">
               <a:ext uri="{FF2B5EF4-FFF2-40B4-BE49-F238E27FC236}">
-                <a16:creationId xmlns:a16="http://schemas.microsoft.com/office/drawing/2014/main" id="{0B446A83-2189-4E45-8C91-0D767134CF7F}"/>
+                <a16:creationId xmlns:a16="http://schemas.microsoft.com/office/drawing/2014/main" id="{4806F5E3-57C9-4BCC-A9E8-7234E179DD29}"/>
               </a:ext>
             </a:extLst>
           </p:cNvPr>
@@ -5447,7 +5447,7 @@
           <p:cNvPr id="11" name="bullet-copy-2">
             <a:extLst xmlns:a="http://schemas.openxmlformats.org/drawingml/2006/main">
               <a:ext uri="{FF2B5EF4-FFF2-40B4-BE49-F238E27FC236}">
-                <a16:creationId xmlns:a16="http://schemas.microsoft.com/office/drawing/2014/main" id="{A33A9DFB-C95C-450E-BB0C-DFA72723497B}"/>
+                <a16:creationId xmlns:a16="http://schemas.microsoft.com/office/drawing/2014/main" id="{A5CFFF82-A874-453F-B57C-241A70B62B9C}"/>
               </a:ext>
             </a:extLst>
           </p:cNvPr>
@@ -5487,7 +5487,7 @@
                   <a:srgbClr val="16343A"/>
                 </a:solidFill>
               </a:rPr>
-              <a:t>Inspect stitch balance, seam alignment, secure starts and finishes, closure position, decoration and overall shape.</a:t>
+              <a:t>Evidence should show decisions and skill—not only a finished product.</a:t>
             </a:r>
           </a:p>
         </p:txBody>
@@ -5497,7 +5497,7 @@
           <p:cNvPr id="12" name="bullet-3">
             <a:extLst xmlns:a="http://schemas.openxmlformats.org/drawingml/2006/main">
               <a:ext uri="{FF2B5EF4-FFF2-40B4-BE49-F238E27FC236}">
-                <a16:creationId xmlns:a16="http://schemas.microsoft.com/office/drawing/2014/main" id="{9BC45333-A4C4-40AC-864D-1384E0CE61FD}"/>
+                <a16:creationId xmlns:a16="http://schemas.microsoft.com/office/drawing/2014/main" id="{F21B2954-D971-4AB0-8CEA-33D538DE02D6}"/>
               </a:ext>
             </a:extLst>
           </p:cNvPr>
@@ -5528,7 +5528,7 @@
           <p:cNvPr id="13" name="bullet-number-3">
             <a:extLst xmlns:a="http://schemas.openxmlformats.org/drawingml/2006/main">
               <a:ext uri="{FF2B5EF4-FFF2-40B4-BE49-F238E27FC236}">
-                <a16:creationId xmlns:a16="http://schemas.microsoft.com/office/drawing/2014/main" id="{7A11601C-C57C-4528-B85B-A876F6D00859}"/>
+                <a16:creationId xmlns:a16="http://schemas.microsoft.com/office/drawing/2014/main" id="{BF7B1505-7B16-45E9-80FE-9D56977353FC}"/>
               </a:ext>
             </a:extLst>
           </p:cNvPr>
@@ -5578,7 +5578,7 @@
           <p:cNvPr id="14" name="bullet-copy-3">
             <a:extLst xmlns:a="http://schemas.openxmlformats.org/drawingml/2006/main">
               <a:ext uri="{FF2B5EF4-FFF2-40B4-BE49-F238E27FC236}">
-                <a16:creationId xmlns:a16="http://schemas.microsoft.com/office/drawing/2014/main" id="{278EBF57-0F26-4C15-8A03-E2CF2D27F991}"/>
+                <a16:creationId xmlns:a16="http://schemas.microsoft.com/office/drawing/2014/main" id="{C9D6B65F-0386-43F8-9500-252D60A69D3F}"/>
               </a:ext>
             </a:extLst>
           </p:cNvPr>
@@ -5618,7 +5618,7 @@
                   <a:srgbClr val="16343A"/>
                 </a:solidFill>
               </a:rPr>
-              <a:t>Photograph real stages and annotate any problem, correction and result.</a:t>
+              <a:t>At each hold point, decide whether to proceed, correct or ask for help.</a:t>
             </a:r>
           </a:p>
         </p:txBody>
@@ -5626,7 +5626,7 @@
     </p:spTree>
     <p:extLst>
       <p:ext uri="{BB962C8B-B14F-4D97-AF65-F5344CB8AC3E}">
-        <p14:creationId xmlns:p14="http://schemas.microsoft.com/office/powerpoint/2010/main" val="1676650352"/>
+        <p14:creationId xmlns:p14="http://schemas.microsoft.com/office/powerpoint/2010/main" val="2132182517"/>
       </p:ext>
     </p:extLst>
   </p:cSld>
@@ -5657,7 +5657,7 @@
           <p:cNvPr id="6" name="closing-rule">
             <a:extLst xmlns:a="http://schemas.openxmlformats.org/drawingml/2006/main">
               <a:ext uri="{FF2B5EF4-FFF2-40B4-BE49-F238E27FC236}">
-                <a16:creationId xmlns:a16="http://schemas.microsoft.com/office/drawing/2014/main" id="{1F69B1A8-7AAC-405D-BC1B-1396D417903D}"/>
+                <a16:creationId xmlns:a16="http://schemas.microsoft.com/office/drawing/2014/main" id="{187DC219-E6E8-4496-B903-76A1BE14832C}"/>
               </a:ext>
             </a:extLst>
           </p:cNvPr>
@@ -5688,7 +5688,7 @@
           <p:cNvPr id="2" name="closing-kicker">
             <a:extLst xmlns:a="http://schemas.openxmlformats.org/drawingml/2006/main">
               <a:ext uri="{FF2B5EF4-FFF2-40B4-BE49-F238E27FC236}">
-                <a16:creationId xmlns:a16="http://schemas.microsoft.com/office/drawing/2014/main" id="{4F6E7C21-CAF2-41FB-BC8B-86E67EA25D8E}"/>
+                <a16:creationId xmlns:a16="http://schemas.microsoft.com/office/drawing/2014/main" id="{87C4F644-1F0D-44A8-8EBB-164F97530854}"/>
               </a:ext>
             </a:extLst>
           </p:cNvPr>
@@ -5738,7 +5738,7 @@
           <p:cNvPr id="3" name="closing-title">
             <a:extLst xmlns:a="http://schemas.openxmlformats.org/drawingml/2006/main">
               <a:ext uri="{FF2B5EF4-FFF2-40B4-BE49-F238E27FC236}">
-                <a16:creationId xmlns:a16="http://schemas.microsoft.com/office/drawing/2014/main" id="{C1BE3A94-9AB3-43DE-A4A4-34A6A9998042}"/>
+                <a16:creationId xmlns:a16="http://schemas.microsoft.com/office/drawing/2014/main" id="{A0F2F16B-721C-4C48-B374-912FA72894B1}"/>
               </a:ext>
             </a:extLst>
           </p:cNvPr>
@@ -5788,7 +5788,7 @@
           <p:cNvPr id="4" name="closing-copy">
             <a:extLst xmlns:a="http://schemas.openxmlformats.org/drawingml/2006/main">
               <a:ext uri="{FF2B5EF4-FFF2-40B4-BE49-F238E27FC236}">
-                <a16:creationId xmlns:a16="http://schemas.microsoft.com/office/drawing/2014/main" id="{09C9C779-C77F-4FB7-BFCF-4D82085AFC1A}"/>
+                <a16:creationId xmlns:a16="http://schemas.microsoft.com/office/drawing/2014/main" id="{0DA09FC5-BC88-4FBF-A3B6-94D29226FCD4}"/>
               </a:ext>
             </a:extLst>
           </p:cNvPr>
@@ -5862,7 +5862,7 @@
                   <a:srgbClr val="E6F2EF"/>
                 </a:solidFill>
               </a:rPr>
-              <a:t>3. Continue Project Activity 9 and keep authentic evidence.</a:t>
+              <a:t>3. Continue the Production control room and keep authentic evidence.</a:t>
             </a:r>
           </a:p>
         </p:txBody>
@@ -5872,7 +5872,7 @@
           <p:cNvPr id="5" name="closing-boundary">
             <a:extLst xmlns:a="http://schemas.openxmlformats.org/drawingml/2006/main">
               <a:ext uri="{FF2B5EF4-FFF2-40B4-BE49-F238E27FC236}">
-                <a16:creationId xmlns:a16="http://schemas.microsoft.com/office/drawing/2014/main" id="{9B44B707-86AC-46CE-AAB4-C90BC5FECD6A}"/>
+                <a16:creationId xmlns:a16="http://schemas.microsoft.com/office/drawing/2014/main" id="{CBFA5A52-D0AA-47E8-AF9E-28DB28887F52}"/>
               </a:ext>
             </a:extLst>
           </p:cNvPr>
@@ -5920,7 +5920,7 @@
     </p:spTree>
     <p:extLst>
       <p:ext uri="{BB962C8B-B14F-4D97-AF65-F5344CB8AC3E}">
-        <p14:creationId xmlns:p14="http://schemas.microsoft.com/office/powerpoint/2010/main" val="646751912"/>
+        <p14:creationId xmlns:p14="http://schemas.microsoft.com/office/powerpoint/2010/main" val="1458054542"/>
       </p:ext>
     </p:extLst>
   </p:cSld>
